--- a/decks/hist-dictatorship/hist-dictatorship_ch5_stalin-rise.pptx
+++ b/decks/hist-dictatorship/hist-dictatorship_ch5_stalin-rise.pptx
@@ -127,30 +127,30 @@
   <p:extLst>
     <p:ext uri="{521415D9-36F7-43E2-AB2F-B90AF26B5E84}">
       <p14:sectionLst xmlns:p14="http://schemas.microsoft.com/office/powerpoint/2010/main">
-        <p14:section name="Opening" id="{528c2354-a7f0-1383-0dc8-6cd4648d42d1}">
+        <p14:section name="Opening" id="{d5465b75-1421-6034-40f8-d0347e0ede0f}">
           <p14:sldIdLst>
             <p14:sldId id="256"/>
           </p14:sldIdLst>
         </p14:section>
-        <p14:section name="Gate" id="{db230154-cdac-e6de-b31c-a67cccbe8a9a}">
+        <p14:section name="Gate" id="{32d7a8e9-757c-d066-4c0a-f0d2ede5234b}">
           <p14:sldIdLst>
             <p14:sldId id="257"/>
             <p14:sldId id="258"/>
           </p14:sldIdLst>
         </p14:section>
-        <p14:section name="Pre-teach" id="{4ed49037-b276-39da-bec4-a8333ef10da4}">
+        <p14:section name="Pre-teach" id="{c054357c-b1a8-811d-b04a-e908da1d4505}">
           <p14:sldIdLst>
             <p14:sldId id="259"/>
             <p14:sldId id="260"/>
           </p14:sldIdLst>
         </p14:section>
-        <p14:section name="Read-along" id="{168e0dea-917d-1b1d-f983-7b6f90dee75c}">
+        <p14:section name="Read-along" id="{ff0efacd-1f00-e8e6-84a8-078f33910525}">
           <p14:sldIdLst>
             <p14:sldId id="261"/>
             <p14:sldId id="262"/>
           </p14:sldIdLst>
         </p14:section>
-        <p14:section name="Teach" id="{c42b5b06-46bb-5723-24f4-d608d2df323c}">
+        <p14:section name="Teach" id="{8211c188-d017-231a-59eb-43f3b70fa07c}">
           <p14:sldIdLst>
             <p14:sldId id="263"/>
             <p14:sldId id="264"/>
@@ -161,19 +161,19 @@
             <p14:sldId id="269"/>
           </p14:sldIdLst>
         </p14:section>
-        <p14:section name="Routes" id="{052c9ea7-f698-16ae-dbc8-af1853e00099}">
+        <p14:section name="Routes" id="{31ff6de3-54e3-90f2-03a4-ba707f88db52}">
           <p14:sldIdLst>
             <p14:sldId id="270"/>
             <p14:sldId id="271"/>
             <p14:sldId id="272"/>
           </p14:sldIdLst>
         </p14:section>
-        <p14:section name="Close" id="{2bbc8682-30fd-9991-7077-987d83b9dbad}">
+        <p14:section name="Close" id="{f7f4a3a6-a01d-b4dc-9094-156eedd301ae}">
           <p14:sldIdLst>
             <p14:sldId id="273"/>
           </p14:sldIdLst>
         </p14:section>
-        <p14:section name="Answers" id="{7b482d36-6684-7fbe-f257-aa28b23bd7c4}">
+        <p14:section name="Answers" id="{c58cf416-5f1d-aca2-c9fc-b78f9ade38ac}">
           <p14:sldIdLst>
             <p14:sldId id="274"/>
             <p14:sldId id="275"/>
@@ -677,7 +677,7 @@
               <a:rPr lang="en-US" dirty="0"/>
               <a:t>Teach — Lenin's death and the struggle to replace him. Say it in your own words, then check understanding with a quick question: ask a pupil from the pre-teach group first, since they met these words and ideas before the lesson. Pupils try to recall before you re-explain.
 Lenin's health failed after 1922, and he was forced to step back from ruling the USSR. He had hoped the group of communist politicians he had appointed would work together, but they wanted power for themselves. Lenin died in 1924, and the battle to replace him grew more intense as Joseph Stalin and Leon Trotsky each tried to take his place.
-Stalin was born in Georgia in 1879, in what was then part of the Russian Empire, and he changed his name to Stalin, which means man of steel. His father was a shoemaker who abandoned the family. Stalin made his name in violent bank raids that raised money for the Communist Party, was twice exiled to Siberia by the Tsar's secret police and escaped each time, and became a leading communist for his part in defending the city of Tsaritsyn during the Civil War.
+Stalin was born in Georgia in 1879, in what was then part of the Russian Empire. The name Stalin was one he took for himself: it means man of steel. He grew up poor, with a shoemaker father who walked out on the family. Stalin made his name in violent bank raids that raised money for the Communist Party, was twice exiled to Siberia by the Tsar's secret police and escaped each time, and became a leading communist for his part in defending the city of Tsaritsyn during the Civil War.
 He was not rated highly by his own side. In 1923 Lenin had called for Stalin to be replaced, and others thought him slow, dull and unimaginative; he was certainly no public speaker, unlike Hitler. But he was ruthless, devious, hardworking and a very clever party politician. He took on boring but important jobs, such as General Secretary, and used them to put his own supporters into the posts that mattered. By 1929 Stalin had secured his position, and Trotsky was exiled in 1929 and left to write against him from abroad.
 Tip: Stalin's advantage was organisation, not oratory. That is the sharpest difference between his rise and Hitler's, and examiners look for it.</a:t>
             </a:r>
@@ -2356,7 +2356,7 @@
             <a:r>
               <a:rPr lang="en-US" dirty="0"/>
               <a:t>Teach — Russia before the revolution. Say it in your own words, then check understanding with a quick question: ask a pupil from the pre-teach group first, since they met these words and ideas before the lesson. Pupils try to recall before you re-explain.
-For over 300 years Russia was ruled by a king called the Tsar. The Tsar had complete power: the people had to do whatever he said. Most Russians were peasants who were very poor and had little money. If you are looking for the four pillars of democracy here, you will not find any of them, and that matters for the comparison you will make later.
+Russia had been ruled for over 300 years by an emperor, the Tsar, whose word was law and who answered to nobody. Most Russians were peasants, with little land and less money. If you are looking for the four pillars of democracy here, you will not find any of them, and that matters for the comparison you will make later.
 The Tsar took Russia into the First World War in 1914, and the Russian people were not ready for a long war. Food, fuel and patience ran out. By the end of 1917 the communists had taken power, and your previous topic on the Russian Revolution is where that story is told in full.
 Keep one difference with Germany in view from the start. Germany in 1933 was a democracy that was taken apart from the inside. Russia had no democracy to take apart: one kind of absolute ruler was replaced by another kind of absolute rule.
 Tip: This contrast is worth a whole paragraph in the final essay: Hitler destroyed a democracy, while Stalin took over a state that was already a dictatorship.</a:t>
@@ -4536,7 +4536,7 @@
                 <a:ea typeface="Calibri" pitchFamily="34" charset="-122"/>
                 <a:cs typeface="Calibri" pitchFamily="34" charset="-120"/>
               </a:rPr>
-              <a:t>Stalin was born in Georgia in 1879, in what was then part of the Russian Empire, and he changed his name to Stalin, which means man of steel.</a:t>
+              <a:t>Stalin was born in Georgia in 1879, in what was then part of the Russian Empire.</a:t>
             </a:r>
             <a:endParaRPr lang="en-US" sz="1800" dirty="0"/>
           </a:p>
@@ -16358,7 +16358,7 @@
                 <a:ea typeface="Calibri" pitchFamily="34" charset="-122"/>
                 <a:cs typeface="Calibri" pitchFamily="34" charset="-120"/>
               </a:rPr>
-              <a:t>For over 300 years Russia was ruled by a king called the Tsar.</a:t>
+              <a:t>Russia had been ruled for over 300 years by an emperor, the Tsar, whose word was law and who answered to nobody.</a:t>
             </a:r>
             <a:endParaRPr lang="en-US" sz="2400" dirty="0"/>
           </a:p>
